--- a/SKYGUARD_AI_Presentation.pptx
+++ b/SKYGUARD_AI_Presentation.pptx
@@ -2815,6 +2815,54 @@
               <a:t>1 / 14</a:t>
             </a:r>
             <a:endParaRPr lang="en-US" sz="800" dirty="0"/>
+          </a:p>
+        </p:txBody>
+      </p:sp>
+      <p:sp>
+        <p:nvSpPr>
+          <p:cNvPr id="36" name="TextBox 35">
+            <a:extLst>
+              <a:ext uri="{FF2B5EF4-FFF2-40B4-BE49-F238E27FC236}">
+                <a16:creationId xmlns:a16="http://schemas.microsoft.com/office/drawing/2014/main" id="{EA24B376-3C8F-4551-B2F8-7F0691177D9E}"/>
+              </a:ext>
+            </a:extLst>
+          </p:cNvPr>
+          <p:cNvSpPr txBox="1"/>
+          <p:nvPr/>
+        </p:nvSpPr>
+        <p:spPr>
+          <a:xfrm>
+            <a:off x="3047306" y="3654028"/>
+            <a:ext cx="3268844" cy="369332"/>
+          </a:xfrm>
+          <a:prstGeom prst="rect">
+            <a:avLst/>
+          </a:prstGeom>
+          <a:noFill/>
+        </p:spPr>
+        <p:txBody>
+          <a:bodyPr wrap="none" rtlCol="0">
+            <a:spAutoFit/>
+          </a:bodyPr>
+          <a:lstStyle/>
+          <a:p>
+            <a:r>
+              <a:rPr lang="en-US" b="1" dirty="0">
+                <a:solidFill>
+                  <a:schemeClr val="bg1"/>
+                </a:solidFill>
+                <a:latin typeface="Times New Roman" panose="02020603050405020304" pitchFamily="18" charset="0"/>
+                <a:cs typeface="Times New Roman" panose="02020603050405020304" pitchFamily="18" charset="0"/>
+              </a:rPr>
+              <a:t>TEAM : DRONE WORRIORS</a:t>
+            </a:r>
+            <a:endParaRPr lang="en-IN" b="1" dirty="0">
+              <a:solidFill>
+                <a:schemeClr val="bg1"/>
+              </a:solidFill>
+              <a:latin typeface="Times New Roman" panose="02020603050405020304" pitchFamily="18" charset="0"/>
+              <a:cs typeface="Times New Roman" panose="02020603050405020304" pitchFamily="18" charset="0"/>
+            </a:endParaRPr>
           </a:p>
         </p:txBody>
       </p:sp>
